--- a/template_cierre.pptx
+++ b/template_cierre.pptx
@@ -5517,7 +5517,7 @@
               <a:rPr lang="es-MX" b="1" dirty="0">
                 <a:latin typeface="Aptos (cuerpo)"/>
               </a:rPr>
-              <a:t>Eventualidades de proyectos con retraso</a:t>
+              <a:t>Eventualidades de proyectos con atraso</a:t>
             </a:r>
             <a:endParaRPr lang="es-MX" b="1" dirty="0">
               <a:highlight>
